--- a/assets/pptx/catalog-236.pptx
+++ b/assets/pptx/catalog-236.pptx
@@ -3402,7 +3402,7 @@
                 <a:ea typeface="Ebrima"/>
                 <a:cs typeface="Ebrima"/>
               </a:rPr>
-              <a:t>ባለት ነው በአሸዋ ቤትህ በምን ላይ ነው (2x)</a:t>
+              <a:t>ባለት ነው በአሸዋ ቤትህ በምን ላይ ነው 2x</a:t>
             </a:r>
           </a:p>
         </p:txBody>
@@ -3881,7 +3881,7 @@
                 <a:ea typeface="Ebrima"/>
                 <a:cs typeface="Ebrima"/>
               </a:rPr>
-              <a:t>በቃ አለፈለት (2x)</a:t>
+              <a:t>በቃ አለፈለት 2x</a:t>
             </a:r>
           </a:p>
         </p:txBody>
@@ -4087,7 +4087,7 @@
                 <a:ea typeface="Ebrima"/>
                 <a:cs typeface="Ebrima"/>
               </a:rPr>
-              <a:t>በቃ አለፈለት (2x)</a:t>
+              <a:t>በቃ አለፈለት 2x</a:t>
             </a:r>
           </a:p>
         </p:txBody>
@@ -4293,7 +4293,7 @@
                 <a:ea typeface="Ebrima"/>
                 <a:cs typeface="Ebrima"/>
               </a:rPr>
-              <a:t>በአለት ነው በአሸዋ ቤትህ በምን ላይ ነው (2x)</a:t>
+              <a:t>በአለት ነው በአሸዋ ቤትህ በምን ላይ ነው 2x</a:t>
             </a:r>
           </a:p>
         </p:txBody>
@@ -4360,61 +4360,61 @@
                 <a:ea typeface="Ebrima"/>
                 <a:cs typeface="Ebrima"/>
               </a:rPr>
-              <a:t>አለቱ ነው መሠረቴ (4x)</a:t>
-            </a:r>
-          </a:p>
-          <a:p>
-            <a:pPr algn="ctr">
-              <a:lnSpc>
-                <a:spcPct val="125000"/>
-              </a:lnSpc>
-            </a:pPr>
-            <a:r>
-              <a:rPr sz="4000" b="0">
-                <a:solidFill>
-                  <a:srgbClr val="FFFFFF"/>
-                </a:solidFill>
-                <a:latin typeface="Ebrima"/>
-                <a:ea typeface="Ebrima"/>
-                <a:cs typeface="Ebrima"/>
-              </a:rPr>
-              <a:t>ኢየሱስ ነው መሠረቴ (4x)</a:t>
-            </a:r>
-          </a:p>
-          <a:p>
-            <a:pPr algn="ctr">
-              <a:lnSpc>
-                <a:spcPct val="125000"/>
-              </a:lnSpc>
-            </a:pPr>
-            <a:r>
-              <a:rPr sz="4000" b="0">
-                <a:solidFill>
-                  <a:srgbClr val="FFFFFF"/>
-                </a:solidFill>
-                <a:latin typeface="Ebrima"/>
-                <a:ea typeface="Ebrima"/>
-                <a:cs typeface="Ebrima"/>
-              </a:rPr>
-              <a:t>አለቱ ነው መሠረቴ (4x)</a:t>
-            </a:r>
-          </a:p>
-          <a:p>
-            <a:pPr algn="ctr">
-              <a:lnSpc>
-                <a:spcPct val="125000"/>
-              </a:lnSpc>
-            </a:pPr>
-            <a:r>
-              <a:rPr sz="4000" b="0">
-                <a:solidFill>
-                  <a:srgbClr val="FFFFFF"/>
-                </a:solidFill>
-                <a:latin typeface="Ebrima"/>
-                <a:ea typeface="Ebrima"/>
-                <a:cs typeface="Ebrima"/>
-              </a:rPr>
-              <a:t>ኢየሱስ ነው መሠረቴ (4x)</a:t>
+              <a:t>አለቱ ነው መሠረቴ 4x</a:t>
+            </a:r>
+          </a:p>
+          <a:p>
+            <a:pPr algn="ctr">
+              <a:lnSpc>
+                <a:spcPct val="125000"/>
+              </a:lnSpc>
+            </a:pPr>
+            <a:r>
+              <a:rPr sz="4000" b="0">
+                <a:solidFill>
+                  <a:srgbClr val="FFFFFF"/>
+                </a:solidFill>
+                <a:latin typeface="Ebrima"/>
+                <a:ea typeface="Ebrima"/>
+                <a:cs typeface="Ebrima"/>
+              </a:rPr>
+              <a:t>ኢየሱስ ነው መሠረቴ 4x</a:t>
+            </a:r>
+          </a:p>
+          <a:p>
+            <a:pPr algn="ctr">
+              <a:lnSpc>
+                <a:spcPct val="125000"/>
+              </a:lnSpc>
+            </a:pPr>
+            <a:r>
+              <a:rPr sz="4000" b="0">
+                <a:solidFill>
+                  <a:srgbClr val="FFFFFF"/>
+                </a:solidFill>
+                <a:latin typeface="Ebrima"/>
+                <a:ea typeface="Ebrima"/>
+                <a:cs typeface="Ebrima"/>
+              </a:rPr>
+              <a:t>አለቱ ነው መሠረቴ 4x</a:t>
+            </a:r>
+          </a:p>
+          <a:p>
+            <a:pPr algn="ctr">
+              <a:lnSpc>
+                <a:spcPct val="125000"/>
+              </a:lnSpc>
+            </a:pPr>
+            <a:r>
+              <a:rPr sz="4000" b="0">
+                <a:solidFill>
+                  <a:srgbClr val="FFFFFF"/>
+                </a:solidFill>
+                <a:latin typeface="Ebrima"/>
+                <a:ea typeface="Ebrima"/>
+                <a:cs typeface="Ebrima"/>
+              </a:rPr>
+              <a:t>ኢየሱስ ነው መሠረቴ 4x</a:t>
             </a:r>
           </a:p>
         </p:txBody>
@@ -4499,7 +4499,7 @@
                 <a:ea typeface="Ebrima"/>
                 <a:cs typeface="Ebrima"/>
               </a:rPr>
-              <a:t>በሕይወቴ አይቼዋለሁ ፍቅሩ ሲዳስሰኝ (4x)</a:t>
+              <a:t>በሕይወቴ አይቼዋለሁ ፍቅሩ ሲዳስሰኝ 4x</a:t>
             </a:r>
           </a:p>
         </p:txBody>
@@ -4566,61 +4566,61 @@
                 <a:ea typeface="Ebrima"/>
                 <a:cs typeface="Ebrima"/>
               </a:rPr>
-              <a:t>አለቱ ነው መሠረቴ (4x)</a:t>
-            </a:r>
-          </a:p>
-          <a:p>
-            <a:pPr algn="ctr">
-              <a:lnSpc>
-                <a:spcPct val="125000"/>
-              </a:lnSpc>
-            </a:pPr>
-            <a:r>
-              <a:rPr sz="4000" b="0">
-                <a:solidFill>
-                  <a:srgbClr val="FFFFFF"/>
-                </a:solidFill>
-                <a:latin typeface="Ebrima"/>
-                <a:ea typeface="Ebrima"/>
-                <a:cs typeface="Ebrima"/>
-              </a:rPr>
-              <a:t>ኢየሱስ ነው መሠረቴ (4x)</a:t>
-            </a:r>
-          </a:p>
-          <a:p>
-            <a:pPr algn="ctr">
-              <a:lnSpc>
-                <a:spcPct val="125000"/>
-              </a:lnSpc>
-            </a:pPr>
-            <a:r>
-              <a:rPr sz="4000" b="0">
-                <a:solidFill>
-                  <a:srgbClr val="FFFFFF"/>
-                </a:solidFill>
-                <a:latin typeface="Ebrima"/>
-                <a:ea typeface="Ebrima"/>
-                <a:cs typeface="Ebrima"/>
-              </a:rPr>
-              <a:t>አለቱ ነው መሠረቴ (4x)</a:t>
-            </a:r>
-          </a:p>
-          <a:p>
-            <a:pPr algn="ctr">
-              <a:lnSpc>
-                <a:spcPct val="125000"/>
-              </a:lnSpc>
-            </a:pPr>
-            <a:r>
-              <a:rPr sz="4000" b="0">
-                <a:solidFill>
-                  <a:srgbClr val="FFFFFF"/>
-                </a:solidFill>
-                <a:latin typeface="Ebrima"/>
-                <a:ea typeface="Ebrima"/>
-                <a:cs typeface="Ebrima"/>
-              </a:rPr>
-              <a:t>ኢየሱስ ነው መሠረቴ (4x)</a:t>
+              <a:t>አለቱ ነው መሠረቴ 4x</a:t>
+            </a:r>
+          </a:p>
+          <a:p>
+            <a:pPr algn="ctr">
+              <a:lnSpc>
+                <a:spcPct val="125000"/>
+              </a:lnSpc>
+            </a:pPr>
+            <a:r>
+              <a:rPr sz="4000" b="0">
+                <a:solidFill>
+                  <a:srgbClr val="FFFFFF"/>
+                </a:solidFill>
+                <a:latin typeface="Ebrima"/>
+                <a:ea typeface="Ebrima"/>
+                <a:cs typeface="Ebrima"/>
+              </a:rPr>
+              <a:t>ኢየሱስ ነው መሠረቴ 4x</a:t>
+            </a:r>
+          </a:p>
+          <a:p>
+            <a:pPr algn="ctr">
+              <a:lnSpc>
+                <a:spcPct val="125000"/>
+              </a:lnSpc>
+            </a:pPr>
+            <a:r>
+              <a:rPr sz="4000" b="0">
+                <a:solidFill>
+                  <a:srgbClr val="FFFFFF"/>
+                </a:solidFill>
+                <a:latin typeface="Ebrima"/>
+                <a:ea typeface="Ebrima"/>
+                <a:cs typeface="Ebrima"/>
+              </a:rPr>
+              <a:t>አለቱ ነው መሠረቴ 4x</a:t>
+            </a:r>
+          </a:p>
+          <a:p>
+            <a:pPr algn="ctr">
+              <a:lnSpc>
+                <a:spcPct val="125000"/>
+              </a:lnSpc>
+            </a:pPr>
+            <a:r>
+              <a:rPr sz="4000" b="0">
+                <a:solidFill>
+                  <a:srgbClr val="FFFFFF"/>
+                </a:solidFill>
+                <a:latin typeface="Ebrima"/>
+                <a:ea typeface="Ebrima"/>
+                <a:cs typeface="Ebrima"/>
+              </a:rPr>
+              <a:t>ኢየሱስ ነው መሠረቴ 4x</a:t>
             </a:r>
           </a:p>
         </p:txBody>
@@ -4705,7 +4705,7 @@
                 <a:ea typeface="Ebrima"/>
                 <a:cs typeface="Ebrima"/>
               </a:rPr>
-              <a:t>በሕይወቴ አይቼዋለሁ ፍቅሩ ሲዳስሰኝ (4x)</a:t>
+              <a:t>በሕይወቴ አይቼዋለሁ ፍቅሩ ሲዳስሰኝ 4x</a:t>
             </a:r>
           </a:p>
         </p:txBody>
@@ -4772,61 +4772,61 @@
                 <a:ea typeface="Ebrima"/>
                 <a:cs typeface="Ebrima"/>
               </a:rPr>
-              <a:t>አለቱ ነው መሠረቴ (4x)</a:t>
-            </a:r>
-          </a:p>
-          <a:p>
-            <a:pPr algn="ctr">
-              <a:lnSpc>
-                <a:spcPct val="125000"/>
-              </a:lnSpc>
-            </a:pPr>
-            <a:r>
-              <a:rPr sz="4000" b="0">
-                <a:solidFill>
-                  <a:srgbClr val="FFFFFF"/>
-                </a:solidFill>
-                <a:latin typeface="Ebrima"/>
-                <a:ea typeface="Ebrima"/>
-                <a:cs typeface="Ebrima"/>
-              </a:rPr>
-              <a:t>ኢየሱስ ነው መሠረቴ (4x)</a:t>
-            </a:r>
-          </a:p>
-          <a:p>
-            <a:pPr algn="ctr">
-              <a:lnSpc>
-                <a:spcPct val="125000"/>
-              </a:lnSpc>
-            </a:pPr>
-            <a:r>
-              <a:rPr sz="4000" b="0">
-                <a:solidFill>
-                  <a:srgbClr val="FFFFFF"/>
-                </a:solidFill>
-                <a:latin typeface="Ebrima"/>
-                <a:ea typeface="Ebrima"/>
-                <a:cs typeface="Ebrima"/>
-              </a:rPr>
-              <a:t>አለቱ ነው መሠረቴ (4x)</a:t>
-            </a:r>
-          </a:p>
-          <a:p>
-            <a:pPr algn="ctr">
-              <a:lnSpc>
-                <a:spcPct val="125000"/>
-              </a:lnSpc>
-            </a:pPr>
-            <a:r>
-              <a:rPr sz="4000" b="0">
-                <a:solidFill>
-                  <a:srgbClr val="FFFFFF"/>
-                </a:solidFill>
-                <a:latin typeface="Ebrima"/>
-                <a:ea typeface="Ebrima"/>
-                <a:cs typeface="Ebrima"/>
-              </a:rPr>
-              <a:t>ኢየሱስ ነው መሠረቴ (4x)</a:t>
+              <a:t>አለቱ ነው መሠረቴ 4x</a:t>
+            </a:r>
+          </a:p>
+          <a:p>
+            <a:pPr algn="ctr">
+              <a:lnSpc>
+                <a:spcPct val="125000"/>
+              </a:lnSpc>
+            </a:pPr>
+            <a:r>
+              <a:rPr sz="4000" b="0">
+                <a:solidFill>
+                  <a:srgbClr val="FFFFFF"/>
+                </a:solidFill>
+                <a:latin typeface="Ebrima"/>
+                <a:ea typeface="Ebrima"/>
+                <a:cs typeface="Ebrima"/>
+              </a:rPr>
+              <a:t>ኢየሱስ ነው መሠረቴ 4x</a:t>
+            </a:r>
+          </a:p>
+          <a:p>
+            <a:pPr algn="ctr">
+              <a:lnSpc>
+                <a:spcPct val="125000"/>
+              </a:lnSpc>
+            </a:pPr>
+            <a:r>
+              <a:rPr sz="4000" b="0">
+                <a:solidFill>
+                  <a:srgbClr val="FFFFFF"/>
+                </a:solidFill>
+                <a:latin typeface="Ebrima"/>
+                <a:ea typeface="Ebrima"/>
+                <a:cs typeface="Ebrima"/>
+              </a:rPr>
+              <a:t>አለቱ ነው መሠረቴ 4x</a:t>
+            </a:r>
+          </a:p>
+          <a:p>
+            <a:pPr algn="ctr">
+              <a:lnSpc>
+                <a:spcPct val="125000"/>
+              </a:lnSpc>
+            </a:pPr>
+            <a:r>
+              <a:rPr sz="4000" b="0">
+                <a:solidFill>
+                  <a:srgbClr val="FFFFFF"/>
+                </a:solidFill>
+                <a:latin typeface="Ebrima"/>
+                <a:ea typeface="Ebrima"/>
+                <a:cs typeface="Ebrima"/>
+              </a:rPr>
+              <a:t>ኢየሱስ ነው መሠረቴ 4x</a:t>
             </a:r>
           </a:p>
         </p:txBody>
@@ -5269,25 +5269,25 @@
                 <a:ea typeface="Ebrima"/>
                 <a:cs typeface="Ebrima"/>
               </a:rPr>
-              <a:t>አሸዋ ከሆነ የቤትህ መሠረት (2x) አቤት ጉድ ፈላበት</a:t>
-            </a:r>
-          </a:p>
-          <a:p>
-            <a:pPr algn="ctr">
-              <a:lnSpc>
-                <a:spcPct val="125000"/>
-              </a:lnSpc>
-            </a:pPr>
-            <a:r>
-              <a:rPr sz="4000" b="0">
-                <a:solidFill>
-                  <a:srgbClr val="FFFFFF"/>
-                </a:solidFill>
-                <a:latin typeface="Ebrima"/>
-                <a:ea typeface="Ebrima"/>
-                <a:cs typeface="Ebrima"/>
-              </a:rPr>
-              <a:t>አሸዋ ከሆነ የቤትህ መሠረት (2x) አቤት ጉድ ፈላበት</a:t>
+              <a:t>አሸዋ ከሆነ የቤትህ መሠረት 2x አቤት ጉድ ፈላበት</a:t>
+            </a:r>
+          </a:p>
+          <a:p>
+            <a:pPr algn="ctr">
+              <a:lnSpc>
+                <a:spcPct val="125000"/>
+              </a:lnSpc>
+            </a:pPr>
+            <a:r>
+              <a:rPr sz="4000" b="0">
+                <a:solidFill>
+                  <a:srgbClr val="FFFFFF"/>
+                </a:solidFill>
+                <a:latin typeface="Ebrima"/>
+                <a:ea typeface="Ebrima"/>
+                <a:cs typeface="Ebrima"/>
+              </a:rPr>
+              <a:t>አሸዋ ከሆነ የቤትህ መሠረት 2x አቤት ጉድ ፈላበት</a:t>
             </a:r>
           </a:p>
         </p:txBody>
